--- a/assets/figures-editable/c3-c4/c3-e06.pptx
+++ b/assets/figures-editable/c3-c4/c3-e06.pptx
@@ -3104,8 +3104,8 @@
         </p:nvSpPr>
         <p:spPr>
           <a:xfrm>
-            <a:off x="274320" y="137160"/>
-            <a:ext cx="11612880" cy="365760"/>
+            <a:off x="274320" y="118872"/>
+            <a:ext cx="11612880" cy="340105"/>
           </a:xfrm>
           <a:prstGeom prst="rect">
             <a:avLst/>
@@ -3114,7 +3114,7 @@
           <a:effectLst/>
         </p:spPr>
         <p:txBody>
-          <a:bodyPr wrap="square" lIns="27432" rIns="27432" tIns="18288" bIns="18288" anchor="ctr">
+          <a:bodyPr wrap="none" lIns="18288" rIns="18288" tIns="18288" bIns="18288" anchor="t">
             <a:spAutoFit/>
           </a:bodyPr>
           <a:lstStyle/>
@@ -3125,7 +3125,7 @@
               </a:spcAft>
             </a:pPr>
             <a:r>
-              <a:rPr sz="2100" b="0" i="0">
+              <a:rPr sz="1900" b="1" i="0">
                 <a:solidFill>
                   <a:srgbClr val="8EDBD4"/>
                 </a:solidFill>
@@ -3136,92 +3136,76 @@
           </a:p>
         </p:txBody>
       </p:sp>
-      <p:cxnSp>
-        <p:nvCxnSpPr>
-          <p:cNvPr id="3" name="C3-E06 line 1" descr="sci-ppt:o001"/>
-          <p:cNvCxnSpPr/>
+      <p:sp>
+        <p:nvSpPr>
+          <p:cNvPr id="3" name="C3-E06 polygon 1" descr="sci-ppt:o001"/>
+          <p:cNvSpPr/>
           <p:nvPr/>
-        </p:nvCxnSpPr>
-        <p:spPr>
-          <a:xfrm>
-            <a:off x="1828800" y="1234440"/>
-            <a:ext cx="871082" cy="1508760"/>
-          </a:xfrm>
-          <a:prstGeom prst="line">
+        </p:nvSpPr>
+        <p:spPr>
+          <a:xfrm>
+            <a:off x="1125503" y="2103120"/>
+            <a:ext cx="2138113" cy="1851660"/>
+          </a:xfrm>
+          <a:custGeom>
             <a:avLst/>
-          </a:prstGeom>
-          <a:ln w="25400">
+            <a:gdLst/>
+            <a:ahLst/>
+            <a:cxnLst/>
+            <a:rect l="l" t="t" r="r" b="b"/>
+            <a:pathLst>
+              <a:path w="2138113" h="1851660">
+                <a:moveTo>
+                  <a:pt x="1069057" y="0"/>
+                </a:moveTo>
+                <a:lnTo>
+                  <a:pt x="2138113" y="1851659"/>
+                </a:lnTo>
+                <a:lnTo>
+                  <a:pt x="0" y="1851660"/>
+                </a:lnTo>
+                <a:close/>
+              </a:path>
+            </a:pathLst>
+          </a:custGeom>
+          <a:solidFill>
+            <a:srgbClr val="1E4A5A"/>
+          </a:solidFill>
+          <a:ln w="20320">
             <a:solidFill>
-              <a:srgbClr val="B4C7D2"/>
+              <a:srgbClr val="8EDBD4"/>
             </a:solidFill>
           </a:ln>
           <a:effectLst/>
         </p:spPr>
-      </p:cxnSp>
-      <p:cxnSp>
-        <p:nvCxnSpPr>
-          <p:cNvPr id="4" name="C3-E06 line 2" descr="sci-ppt:o002"/>
-          <p:cNvCxnSpPr/>
-          <p:nvPr/>
-        </p:nvCxnSpPr>
-        <p:spPr>
-          <a:xfrm flipH="1">
-            <a:off x="957717" y="2743200"/>
-            <a:ext cx="1742165" cy="0"/>
-          </a:xfrm>
-          <a:prstGeom prst="line">
-            <a:avLst/>
-          </a:prstGeom>
-          <a:ln w="25400">
-            <a:solidFill>
-              <a:srgbClr val="B4C7D2"/>
-            </a:solidFill>
-          </a:ln>
-          <a:effectLst/>
-        </p:spPr>
-      </p:cxnSp>
-      <p:cxnSp>
-        <p:nvCxnSpPr>
-          <p:cNvPr id="5" name="C3-E06 line 3" descr="sci-ppt:o003"/>
-          <p:cNvCxnSpPr/>
-          <p:nvPr/>
-        </p:nvCxnSpPr>
-        <p:spPr>
-          <a:xfrm flipV="1">
-            <a:off x="957717" y="1234440"/>
-            <a:ext cx="871083" cy="1508760"/>
-          </a:xfrm>
-          <a:prstGeom prst="line">
-            <a:avLst/>
-          </a:prstGeom>
-          <a:ln w="25400">
-            <a:solidFill>
-              <a:srgbClr val="B4C7D2"/>
-            </a:solidFill>
-          </a:ln>
-          <a:effectLst/>
-        </p:spPr>
-      </p:cxnSp>
-      <p:sp>
-        <p:nvSpPr>
-          <p:cNvPr id="6" name="C3-E06 ellipse 4" descr="sci-ppt:o004"/>
+        <p:txBody>
+          <a:bodyPr rtlCol="0" anchor="ctr"/>
+          <a:lstStyle/>
+          <a:p>
+            <a:pPr algn="ctr"/>
+          </a:p>
+        </p:txBody>
+      </p:sp>
+      <p:sp>
+        <p:nvSpPr>
+          <p:cNvPr id="4" name="C3-E06 ellipse 2" descr="sci-ppt:o002"/>
           <p:cNvSpPr/>
           <p:nvPr/>
         </p:nvSpPr>
         <p:spPr>
           <a:xfrm>
-            <a:off x="1664208" y="1069848"/>
-            <a:ext cx="329184" cy="329184"/>
+            <a:off x="2011679" y="1920239"/>
+            <a:ext cx="365760" cy="365760"/>
           </a:xfrm>
           <a:prstGeom prst="ellipse">
             <a:avLst/>
           </a:prstGeom>
           <a:solidFill>
-            <a:srgbClr val="213E4B"/>
+            <a:srgbClr val="0C1820"/>
           </a:solidFill>
-          <a:ln w="19050">
+          <a:ln w="27940">
             <a:solidFill>
-              <a:srgbClr val="B4C7D2"/>
+              <a:srgbClr val="F2B880"/>
             </a:solidFill>
           </a:ln>
           <a:effectLst/>
@@ -3236,24 +3220,24 @@
       </p:sp>
       <p:sp>
         <p:nvSpPr>
-          <p:cNvPr id="7" name="C3-E06 ellipse 5" descr="sci-ppt:o005"/>
+          <p:cNvPr id="5" name="C3-E06 ellipse 3" descr="sci-ppt:o003"/>
           <p:cNvSpPr/>
           <p:nvPr/>
         </p:nvSpPr>
         <p:spPr>
           <a:xfrm>
-            <a:off x="2535290" y="2578608"/>
-            <a:ext cx="329184" cy="329184"/>
+            <a:off x="3080736" y="3771899"/>
+            <a:ext cx="365760" cy="365760"/>
           </a:xfrm>
           <a:prstGeom prst="ellipse">
             <a:avLst/>
           </a:prstGeom>
           <a:solidFill>
-            <a:srgbClr val="213E4B"/>
+            <a:srgbClr val="0C1820"/>
           </a:solidFill>
-          <a:ln w="19050">
+          <a:ln w="27940">
             <a:solidFill>
-              <a:srgbClr val="B4C7D2"/>
+              <a:srgbClr val="F2B880"/>
             </a:solidFill>
           </a:ln>
           <a:effectLst/>
@@ -3268,24 +3252,24 @@
       </p:sp>
       <p:sp>
         <p:nvSpPr>
-          <p:cNvPr id="8" name="C3-E06 ellipse 6" descr="sci-ppt:o006"/>
+          <p:cNvPr id="6" name="C3-E06 ellipse 4" descr="sci-ppt:o004"/>
           <p:cNvSpPr/>
           <p:nvPr/>
         </p:nvSpPr>
         <p:spPr>
           <a:xfrm>
-            <a:off x="793125" y="2578608"/>
-            <a:ext cx="329184" cy="329184"/>
+            <a:off x="942623" y="3771900"/>
+            <a:ext cx="365760" cy="365760"/>
           </a:xfrm>
           <a:prstGeom prst="ellipse">
             <a:avLst/>
           </a:prstGeom>
           <a:solidFill>
-            <a:srgbClr val="213E4B"/>
+            <a:srgbClr val="0C1820"/>
           </a:solidFill>
-          <a:ln w="19050">
+          <a:ln w="27940">
             <a:solidFill>
-              <a:srgbClr val="B4C7D2"/>
+              <a:srgbClr val="F2B880"/>
             </a:solidFill>
           </a:ln>
           <a:effectLst/>
@@ -3300,14 +3284,14 @@
       </p:sp>
       <p:sp>
         <p:nvSpPr>
-          <p:cNvPr id="9" name="C3-E06 text 7" descr="sci-ppt:o007"/>
+          <p:cNvPr id="7" name="C3-E06 text 5" descr="sci-ppt:o005"/>
           <p:cNvSpPr txBox="1"/>
           <p:nvPr/>
         </p:nvSpPr>
         <p:spPr>
           <a:xfrm>
-            <a:off x="1188720" y="3429000"/>
-            <a:ext cx="1828800" cy="274320"/>
+            <a:off x="914400" y="4709160"/>
+            <a:ext cx="2560320" cy="278130"/>
           </a:xfrm>
           <a:prstGeom prst="rect">
             <a:avLst/>
@@ -3316,25 +3300,118 @@
           <a:effectLst/>
         </p:spPr>
         <p:txBody>
-          <a:bodyPr wrap="square" lIns="27432" rIns="27432" tIns="18288" bIns="18288" anchor="ctr">
+          <a:bodyPr wrap="none" lIns="18288" rIns="18288" tIns="18288" bIns="18288" anchor="t">
             <a:spAutoFit/>
           </a:bodyPr>
           <a:lstStyle/>
           <a:p>
-            <a:pPr algn="l">
+            <a:pPr algn="ctr">
               <a:spcAft>
                 <a:spcPts val="0"/>
               </a:spcAft>
             </a:pPr>
             <a:r>
-              <a:rPr sz="1700" b="0" i="0">
+              <a:rPr sz="1500" b="1" i="0">
                 <a:solidFill>
-                  <a:srgbClr val="E7F0F3"/>
+                  <a:srgbClr val="8EDBD4"/>
                 </a:solidFill>
                 <a:latin typeface="Arial"/>
               </a:rPr>
               <a:t>N = 3</a:t>
             </a:r>
+          </a:p>
+        </p:txBody>
+      </p:sp>
+      <p:sp>
+        <p:nvSpPr>
+          <p:cNvPr id="8" name="C3-E06 text 6" descr="sci-ppt:o006"/>
+          <p:cNvSpPr txBox="1"/>
+          <p:nvPr/>
+        </p:nvSpPr>
+        <p:spPr>
+          <a:xfrm>
+            <a:off x="731519" y="5029200"/>
+            <a:ext cx="2926080" cy="262636"/>
+          </a:xfrm>
+          <a:prstGeom prst="rect">
+            <a:avLst/>
+          </a:prstGeom>
+          <a:noFill/>
+          <a:effectLst/>
+        </p:spPr>
+        <p:txBody>
+          <a:bodyPr wrap="none" lIns="18288" rIns="18288" tIns="18288" bIns="18288" anchor="t">
+            <a:spAutoFit/>
+          </a:bodyPr>
+          <a:lstStyle/>
+          <a:p>
+            <a:pPr algn="ctr">
+              <a:spcAft>
+                <a:spcPts val="0"/>
+              </a:spcAft>
+            </a:pPr>
+            <a:r>
+              <a:rPr sz="1400" b="1" i="0">
+                <a:solidFill>
+                  <a:srgbClr val="F2B880"/>
+                </a:solidFill>
+                <a:latin typeface="Arial"/>
+              </a:rPr>
+              <a:t>S₃ s = 2.0000</a:t>
+            </a:r>
+          </a:p>
+        </p:txBody>
+      </p:sp>
+      <p:sp>
+        <p:nvSpPr>
+          <p:cNvPr id="9" name="C3-E06 polygon 7" descr="sci-ppt:o007"/>
+          <p:cNvSpPr/>
+          <p:nvPr/>
+        </p:nvSpPr>
+        <p:spPr>
+          <a:xfrm>
+            <a:off x="4800600" y="2103120"/>
+            <a:ext cx="2468879" cy="2468880"/>
+          </a:xfrm>
+          <a:custGeom>
+            <a:avLst/>
+            <a:gdLst/>
+            <a:ahLst/>
+            <a:cxnLst/>
+            <a:rect l="l" t="t" r="r" b="b"/>
+            <a:pathLst>
+              <a:path w="2468879" h="2468880">
+                <a:moveTo>
+                  <a:pt x="1234440" y="0"/>
+                </a:moveTo>
+                <a:lnTo>
+                  <a:pt x="2468879" y="1234440"/>
+                </a:lnTo>
+                <a:lnTo>
+                  <a:pt x="1234440" y="2468880"/>
+                </a:lnTo>
+                <a:lnTo>
+                  <a:pt x="0" y="1234440"/>
+                </a:lnTo>
+                <a:close/>
+              </a:path>
+            </a:pathLst>
+          </a:custGeom>
+          <a:solidFill>
+            <a:srgbClr val="1E4A5A"/>
+          </a:solidFill>
+          <a:ln w="20320">
+            <a:solidFill>
+              <a:srgbClr val="8EDBD4"/>
+            </a:solidFill>
+          </a:ln>
+          <a:effectLst/>
+        </p:spPr>
+        <p:txBody>
+          <a:bodyPr rtlCol="0" anchor="ctr"/>
+          <a:lstStyle/>
+          <a:p>
+            <a:pPr algn="ctr"/>
           </a:p>
         </p:txBody>
       </p:sp>
@@ -3346,16 +3423,17 @@
         </p:nvCxnSpPr>
         <p:spPr>
           <a:xfrm>
-            <a:off x="6035040" y="1234440"/>
-            <a:ext cx="1005839" cy="1005840"/>
+            <a:off x="6035040" y="2103120"/>
+            <a:ext cx="0" cy="2468880"/>
           </a:xfrm>
           <a:prstGeom prst="line">
             <a:avLst/>
           </a:prstGeom>
-          <a:ln w="25400">
+          <a:ln w="13970">
             <a:solidFill>
               <a:srgbClr val="B4C7D2"/>
             </a:solidFill>
+            <a:prstDash val="dash"/>
           </a:ln>
           <a:effectLst/>
         </p:spPr>
@@ -3368,84 +3446,41 @@
         </p:nvCxnSpPr>
         <p:spPr>
           <a:xfrm flipH="1">
-            <a:off x="6035040" y="2240280"/>
-            <a:ext cx="1005839" cy="1005840"/>
+            <a:off x="4800600" y="3337560"/>
+            <a:ext cx="2468879" cy="0"/>
           </a:xfrm>
           <a:prstGeom prst="line">
             <a:avLst/>
           </a:prstGeom>
-          <a:ln w="25400">
+          <a:ln w="13970">
             <a:solidFill>
               <a:srgbClr val="B4C7D2"/>
             </a:solidFill>
+            <a:prstDash val="dash"/>
           </a:ln>
           <a:effectLst/>
         </p:spPr>
       </p:cxnSp>
-      <p:cxnSp>
-        <p:nvCxnSpPr>
-          <p:cNvPr id="12" name="C3-E06 line 10" descr="sci-ppt:o010"/>
-          <p:cNvCxnSpPr/>
-          <p:nvPr/>
-        </p:nvCxnSpPr>
-        <p:spPr>
-          <a:xfrm flipH="1" flipV="1">
-            <a:off x="5029200" y="2240280"/>
-            <a:ext cx="1005840" cy="1005840"/>
-          </a:xfrm>
-          <a:prstGeom prst="line">
-            <a:avLst/>
-          </a:prstGeom>
-          <a:ln w="25400">
-            <a:solidFill>
-              <a:srgbClr val="B4C7D2"/>
-            </a:solidFill>
-          </a:ln>
-          <a:effectLst/>
-        </p:spPr>
-      </p:cxnSp>
-      <p:cxnSp>
-        <p:nvCxnSpPr>
-          <p:cNvPr id="13" name="C3-E06 line 11" descr="sci-ppt:o011"/>
-          <p:cNvCxnSpPr/>
-          <p:nvPr/>
-        </p:nvCxnSpPr>
-        <p:spPr>
-          <a:xfrm flipV="1">
-            <a:off x="5029200" y="1234440"/>
-            <a:ext cx="1005840" cy="1005840"/>
-          </a:xfrm>
-          <a:prstGeom prst="line">
-            <a:avLst/>
-          </a:prstGeom>
-          <a:ln w="25400">
-            <a:solidFill>
-              <a:srgbClr val="B4C7D2"/>
-            </a:solidFill>
-          </a:ln>
-          <a:effectLst/>
-        </p:spPr>
-      </p:cxnSp>
-      <p:sp>
-        <p:nvSpPr>
-          <p:cNvPr id="14" name="C3-E06 ellipse 12" descr="sci-ppt:o012"/>
+      <p:sp>
+        <p:nvSpPr>
+          <p:cNvPr id="12" name="C3-E06 ellipse 10" descr="sci-ppt:o010"/>
           <p:cNvSpPr/>
           <p:nvPr/>
         </p:nvSpPr>
         <p:spPr>
           <a:xfrm>
-            <a:off x="5870448" y="1069848"/>
-            <a:ext cx="329184" cy="329184"/>
+            <a:off x="5852159" y="1920239"/>
+            <a:ext cx="365760" cy="365760"/>
           </a:xfrm>
           <a:prstGeom prst="ellipse">
             <a:avLst/>
           </a:prstGeom>
           <a:solidFill>
-            <a:srgbClr val="213E4B"/>
+            <a:srgbClr val="0C1820"/>
           </a:solidFill>
-          <a:ln w="19050">
+          <a:ln w="27940">
             <a:solidFill>
-              <a:srgbClr val="B4C7D2"/>
+              <a:srgbClr val="F2B880"/>
             </a:solidFill>
           </a:ln>
           <a:effectLst/>
@@ -3460,24 +3495,24 @@
       </p:sp>
       <p:sp>
         <p:nvSpPr>
-          <p:cNvPr id="15" name="C3-E06 ellipse 13" descr="sci-ppt:o013"/>
+          <p:cNvPr id="13" name="C3-E06 ellipse 11" descr="sci-ppt:o011"/>
           <p:cNvSpPr/>
           <p:nvPr/>
         </p:nvSpPr>
         <p:spPr>
           <a:xfrm>
-            <a:off x="6876288" y="2075688"/>
-            <a:ext cx="329184" cy="329184"/>
+            <a:off x="7086599" y="3154679"/>
+            <a:ext cx="365760" cy="365760"/>
           </a:xfrm>
           <a:prstGeom prst="ellipse">
             <a:avLst/>
           </a:prstGeom>
           <a:solidFill>
-            <a:srgbClr val="213E4B"/>
+            <a:srgbClr val="0C1820"/>
           </a:solidFill>
-          <a:ln w="19050">
+          <a:ln w="27940">
             <a:solidFill>
-              <a:srgbClr val="B4C7D2"/>
+              <a:srgbClr val="F2B880"/>
             </a:solidFill>
           </a:ln>
           <a:effectLst/>
@@ -3492,24 +3527,24 @@
       </p:sp>
       <p:sp>
         <p:nvSpPr>
-          <p:cNvPr id="16" name="C3-E06 ellipse 14" descr="sci-ppt:o014"/>
+          <p:cNvPr id="14" name="C3-E06 ellipse 12" descr="sci-ppt:o012"/>
           <p:cNvSpPr/>
           <p:nvPr/>
         </p:nvSpPr>
         <p:spPr>
           <a:xfrm>
-            <a:off x="5870448" y="3081528"/>
-            <a:ext cx="329184" cy="329184"/>
+            <a:off x="5852159" y="4389120"/>
+            <a:ext cx="365760" cy="365760"/>
           </a:xfrm>
           <a:prstGeom prst="ellipse">
             <a:avLst/>
           </a:prstGeom>
           <a:solidFill>
-            <a:srgbClr val="213E4B"/>
+            <a:srgbClr val="0C1820"/>
           </a:solidFill>
-          <a:ln w="19050">
+          <a:ln w="27940">
             <a:solidFill>
-              <a:srgbClr val="B4C7D2"/>
+              <a:srgbClr val="F2B880"/>
             </a:solidFill>
           </a:ln>
           <a:effectLst/>
@@ -3524,24 +3559,24 @@
       </p:sp>
       <p:sp>
         <p:nvSpPr>
-          <p:cNvPr id="17" name="C3-E06 ellipse 15" descr="sci-ppt:o015"/>
+          <p:cNvPr id="15" name="C3-E06 ellipse 13" descr="sci-ppt:o013"/>
           <p:cNvSpPr/>
           <p:nvPr/>
         </p:nvSpPr>
         <p:spPr>
           <a:xfrm>
-            <a:off x="4864608" y="2075688"/>
-            <a:ext cx="329184" cy="329184"/>
+            <a:off x="4617720" y="3154680"/>
+            <a:ext cx="365760" cy="365760"/>
           </a:xfrm>
           <a:prstGeom prst="ellipse">
             <a:avLst/>
           </a:prstGeom>
           <a:solidFill>
-            <a:srgbClr val="213E4B"/>
+            <a:srgbClr val="0C1820"/>
           </a:solidFill>
-          <a:ln w="19050">
+          <a:ln w="27940">
             <a:solidFill>
-              <a:srgbClr val="B4C7D2"/>
+              <a:srgbClr val="F2B880"/>
             </a:solidFill>
           </a:ln>
           <a:effectLst/>
@@ -3556,14 +3591,14 @@
       </p:sp>
       <p:sp>
         <p:nvSpPr>
-          <p:cNvPr id="18" name="C3-E06 text 16" descr="sci-ppt:o016"/>
+          <p:cNvPr id="16" name="C3-E06 text 14" descr="sci-ppt:o014"/>
           <p:cNvSpPr txBox="1"/>
           <p:nvPr/>
         </p:nvSpPr>
         <p:spPr>
           <a:xfrm>
-            <a:off x="5394959" y="3429000"/>
-            <a:ext cx="1828800" cy="274320"/>
+            <a:off x="4754879" y="4709160"/>
+            <a:ext cx="2560320" cy="278130"/>
           </a:xfrm>
           <a:prstGeom prst="rect">
             <a:avLst/>
@@ -3572,25 +3607,121 @@
           <a:effectLst/>
         </p:spPr>
         <p:txBody>
-          <a:bodyPr wrap="square" lIns="27432" rIns="27432" tIns="18288" bIns="18288" anchor="ctr">
+          <a:bodyPr wrap="none" lIns="18288" rIns="18288" tIns="18288" bIns="18288" anchor="t">
             <a:spAutoFit/>
           </a:bodyPr>
           <a:lstStyle/>
           <a:p>
-            <a:pPr algn="l">
+            <a:pPr algn="ctr">
               <a:spcAft>
                 <a:spcPts val="0"/>
               </a:spcAft>
             </a:pPr>
             <a:r>
-              <a:rPr sz="1700" b="0" i="0">
+              <a:rPr sz="1500" b="1" i="0">
                 <a:solidFill>
-                  <a:srgbClr val="E7F0F3"/>
+                  <a:srgbClr val="8EDBD4"/>
                 </a:solidFill>
                 <a:latin typeface="Arial"/>
               </a:rPr>
               <a:t>N = 4</a:t>
             </a:r>
+          </a:p>
+        </p:txBody>
+      </p:sp>
+      <p:sp>
+        <p:nvSpPr>
+          <p:cNvPr id="17" name="C3-E06 text 15" descr="sci-ppt:o015"/>
+          <p:cNvSpPr txBox="1"/>
+          <p:nvPr/>
+        </p:nvSpPr>
+        <p:spPr>
+          <a:xfrm>
+            <a:off x="4572000" y="5029200"/>
+            <a:ext cx="2926080" cy="262636"/>
+          </a:xfrm>
+          <a:prstGeom prst="rect">
+            <a:avLst/>
+          </a:prstGeom>
+          <a:noFill/>
+          <a:effectLst/>
+        </p:spPr>
+        <p:txBody>
+          <a:bodyPr wrap="none" lIns="18288" rIns="18288" tIns="18288" bIns="18288" anchor="t">
+            <a:spAutoFit/>
+          </a:bodyPr>
+          <a:lstStyle/>
+          <a:p>
+            <a:pPr algn="ctr">
+              <a:spcAft>
+                <a:spcPts val="0"/>
+              </a:spcAft>
+            </a:pPr>
+            <a:r>
+              <a:rPr sz="1400" b="1" i="0">
+                <a:solidFill>
+                  <a:srgbClr val="F2B880"/>
+                </a:solidFill>
+                <a:latin typeface="Arial"/>
+              </a:rPr>
+              <a:t>S₄ s = 2.7071</a:t>
+            </a:r>
+          </a:p>
+        </p:txBody>
+      </p:sp>
+      <p:sp>
+        <p:nvSpPr>
+          <p:cNvPr id="18" name="C3-E06 polygon 16" descr="sci-ppt:o016"/>
+          <p:cNvSpPr/>
+          <p:nvPr/>
+        </p:nvSpPr>
+        <p:spPr>
+          <a:xfrm>
+            <a:off x="8701497" y="2103120"/>
+            <a:ext cx="2348045" cy="2233122"/>
+          </a:xfrm>
+          <a:custGeom>
+            <a:avLst/>
+            <a:gdLst/>
+            <a:ahLst/>
+            <a:cxnLst/>
+            <a:rect l="l" t="t" r="r" b="b"/>
+            <a:pathLst>
+              <a:path w="2348045" h="2233122">
+                <a:moveTo>
+                  <a:pt x="1174023" y="0"/>
+                </a:moveTo>
+                <a:lnTo>
+                  <a:pt x="2348045" y="852977"/>
+                </a:lnTo>
+                <a:lnTo>
+                  <a:pt x="1899608" y="2233122"/>
+                </a:lnTo>
+                <a:lnTo>
+                  <a:pt x="448437" y="2233122"/>
+                </a:lnTo>
+                <a:lnTo>
+                  <a:pt x="0" y="852977"/>
+                </a:lnTo>
+                <a:close/>
+              </a:path>
+            </a:pathLst>
+          </a:custGeom>
+          <a:solidFill>
+            <a:srgbClr val="1E4A5A"/>
+          </a:solidFill>
+          <a:ln w="20320">
+            <a:solidFill>
+              <a:srgbClr val="8EDBD4"/>
+            </a:solidFill>
+          </a:ln>
+          <a:effectLst/>
+        </p:spPr>
+        <p:txBody>
+          <a:bodyPr rtlCol="0" anchor="ctr"/>
+          <a:lstStyle/>
+          <a:p>
+            <a:pPr algn="ctr"/>
           </a:p>
         </p:txBody>
       </p:sp>
@@ -3602,16 +3733,17 @@
         </p:nvCxnSpPr>
         <p:spPr>
           <a:xfrm>
-            <a:off x="10058400" y="1234440"/>
-            <a:ext cx="956610" cy="695018"/>
+            <a:off x="9875520" y="2103120"/>
+            <a:ext cx="725585" cy="2233122"/>
           </a:xfrm>
           <a:prstGeom prst="line">
             <a:avLst/>
           </a:prstGeom>
-          <a:ln w="25400">
+          <a:ln w="13970">
             <a:solidFill>
               <a:srgbClr val="B4C7D2"/>
             </a:solidFill>
+            <a:prstDash val="dash"/>
           </a:ln>
           <a:effectLst/>
         </p:spPr>
@@ -3624,16 +3756,17 @@
         </p:nvCxnSpPr>
         <p:spPr>
           <a:xfrm flipH="1">
-            <a:off x="10649617" y="1929458"/>
-            <a:ext cx="365393" cy="1124563"/>
+            <a:off x="9149934" y="2103120"/>
+            <a:ext cx="725586" cy="2233122"/>
           </a:xfrm>
           <a:prstGeom prst="line">
             <a:avLst/>
           </a:prstGeom>
-          <a:ln w="25400">
+          <a:ln w="13970">
             <a:solidFill>
               <a:srgbClr val="B4C7D2"/>
             </a:solidFill>
+            <a:prstDash val="dash"/>
           </a:ln>
           <a:effectLst/>
         </p:spPr>
@@ -3646,16 +3779,17 @@
         </p:nvCxnSpPr>
         <p:spPr>
           <a:xfrm flipH="1">
-            <a:off x="9467182" y="3054021"/>
-            <a:ext cx="1182435" cy="0"/>
+            <a:off x="9149934" y="2956097"/>
+            <a:ext cx="1899608" cy="1380145"/>
           </a:xfrm>
           <a:prstGeom prst="line">
             <a:avLst/>
           </a:prstGeom>
-          <a:ln w="25400">
+          <a:ln w="13970">
             <a:solidFill>
               <a:srgbClr val="B4C7D2"/>
             </a:solidFill>
+            <a:prstDash val="dash"/>
           </a:ln>
           <a:effectLst/>
         </p:spPr>
@@ -3667,17 +3801,18 @@
           <p:nvPr/>
         </p:nvCxnSpPr>
         <p:spPr>
-          <a:xfrm flipH="1" flipV="1">
-            <a:off x="9101789" y="1929458"/>
-            <a:ext cx="365393" cy="1124563"/>
+          <a:xfrm flipH="1">
+            <a:off x="8701497" y="2956097"/>
+            <a:ext cx="2348045" cy="0"/>
           </a:xfrm>
           <a:prstGeom prst="line">
             <a:avLst/>
           </a:prstGeom>
-          <a:ln w="25400">
+          <a:ln w="13970">
             <a:solidFill>
               <a:srgbClr val="B4C7D2"/>
             </a:solidFill>
+            <a:prstDash val="dash"/>
           </a:ln>
           <a:effectLst/>
         </p:spPr>
@@ -3689,17 +3824,18 @@
           <p:nvPr/>
         </p:nvCxnSpPr>
         <p:spPr>
-          <a:xfrm flipV="1">
-            <a:off x="9101789" y="1234440"/>
-            <a:ext cx="956611" cy="695018"/>
+          <a:xfrm flipH="1" flipV="1">
+            <a:off x="8701497" y="2956097"/>
+            <a:ext cx="1899608" cy="1380145"/>
           </a:xfrm>
           <a:prstGeom prst="line">
             <a:avLst/>
           </a:prstGeom>
-          <a:ln w="25400">
+          <a:ln w="13970">
             <a:solidFill>
               <a:srgbClr val="B4C7D2"/>
             </a:solidFill>
+            <a:prstDash val="dash"/>
           </a:ln>
           <a:effectLst/>
         </p:spPr>
@@ -3712,18 +3848,18 @@
         </p:nvSpPr>
         <p:spPr>
           <a:xfrm>
-            <a:off x="9893808" y="1069848"/>
-            <a:ext cx="329184" cy="329184"/>
+            <a:off x="9692640" y="1920239"/>
+            <a:ext cx="365760" cy="365760"/>
           </a:xfrm>
           <a:prstGeom prst="ellipse">
             <a:avLst/>
           </a:prstGeom>
           <a:solidFill>
-            <a:srgbClr val="213E4B"/>
+            <a:srgbClr val="0C1820"/>
           </a:solidFill>
-          <a:ln w="19050">
+          <a:ln w="27940">
             <a:solidFill>
-              <a:srgbClr val="B4C7D2"/>
+              <a:srgbClr val="F2B880"/>
             </a:solidFill>
           </a:ln>
           <a:effectLst/>
@@ -3744,18 +3880,18 @@
         </p:nvSpPr>
         <p:spPr>
           <a:xfrm>
-            <a:off x="10850418" y="1764866"/>
-            <a:ext cx="329184" cy="329184"/>
+            <a:off x="10866662" y="2773217"/>
+            <a:ext cx="365760" cy="365760"/>
           </a:xfrm>
           <a:prstGeom prst="ellipse">
             <a:avLst/>
           </a:prstGeom>
           <a:solidFill>
-            <a:srgbClr val="213E4B"/>
+            <a:srgbClr val="0C1820"/>
           </a:solidFill>
-          <a:ln w="19050">
+          <a:ln w="27940">
             <a:solidFill>
-              <a:srgbClr val="B4C7D2"/>
+              <a:srgbClr val="F2B880"/>
             </a:solidFill>
           </a:ln>
           <a:effectLst/>
@@ -3776,18 +3912,18 @@
         </p:nvSpPr>
         <p:spPr>
           <a:xfrm>
-            <a:off x="10485025" y="2889429"/>
-            <a:ext cx="329184" cy="329184"/>
+            <a:off x="10418225" y="4153362"/>
+            <a:ext cx="365760" cy="365760"/>
           </a:xfrm>
           <a:prstGeom prst="ellipse">
             <a:avLst/>
           </a:prstGeom>
           <a:solidFill>
-            <a:srgbClr val="213E4B"/>
+            <a:srgbClr val="0C1820"/>
           </a:solidFill>
-          <a:ln w="19050">
+          <a:ln w="27940">
             <a:solidFill>
-              <a:srgbClr val="B4C7D2"/>
+              <a:srgbClr val="F2B880"/>
             </a:solidFill>
           </a:ln>
           <a:effectLst/>
@@ -3808,18 +3944,18 @@
         </p:nvSpPr>
         <p:spPr>
           <a:xfrm>
-            <a:off x="9302590" y="2889429"/>
-            <a:ext cx="329184" cy="329184"/>
+            <a:off x="8967054" y="4153362"/>
+            <a:ext cx="365760" cy="365760"/>
           </a:xfrm>
           <a:prstGeom prst="ellipse">
             <a:avLst/>
           </a:prstGeom>
           <a:solidFill>
-            <a:srgbClr val="213E4B"/>
+            <a:srgbClr val="0C1820"/>
           </a:solidFill>
-          <a:ln w="19050">
+          <a:ln w="27940">
             <a:solidFill>
-              <a:srgbClr val="B4C7D2"/>
+              <a:srgbClr val="F2B880"/>
             </a:solidFill>
           </a:ln>
           <a:effectLst/>
@@ -3840,18 +3976,18 @@
         </p:nvSpPr>
         <p:spPr>
           <a:xfrm>
-            <a:off x="8937197" y="1764866"/>
-            <a:ext cx="329184" cy="329184"/>
+            <a:off x="8518617" y="2773217"/>
+            <a:ext cx="365760" cy="365760"/>
           </a:xfrm>
           <a:prstGeom prst="ellipse">
             <a:avLst/>
           </a:prstGeom>
           <a:solidFill>
-            <a:srgbClr val="213E4B"/>
+            <a:srgbClr val="0C1820"/>
           </a:solidFill>
-          <a:ln w="19050">
+          <a:ln w="27940">
             <a:solidFill>
-              <a:srgbClr val="B4C7D2"/>
+              <a:srgbClr val="F2B880"/>
             </a:solidFill>
           </a:ln>
           <a:effectLst/>
@@ -3872,8 +4008,8 @@
         </p:nvSpPr>
         <p:spPr>
           <a:xfrm>
-            <a:off x="9418320" y="3429000"/>
-            <a:ext cx="1828800" cy="274320"/>
+            <a:off x="8595360" y="4709160"/>
+            <a:ext cx="2560320" cy="278130"/>
           </a:xfrm>
           <a:prstGeom prst="rect">
             <a:avLst/>
@@ -3882,7 +4018,87 @@
           <a:effectLst/>
         </p:spPr>
         <p:txBody>
-          <a:bodyPr wrap="square" lIns="27432" rIns="27432" tIns="18288" bIns="18288" anchor="ctr">
+          <a:bodyPr wrap="none" lIns="18288" rIns="18288" tIns="18288" bIns="18288" anchor="t">
+            <a:spAutoFit/>
+          </a:bodyPr>
+          <a:lstStyle/>
+          <a:p>
+            <a:pPr algn="ctr">
+              <a:spcAft>
+                <a:spcPts val="0"/>
+              </a:spcAft>
+            </a:pPr>
+            <a:r>
+              <a:rPr sz="1500" b="1" i="0">
+                <a:solidFill>
+                  <a:srgbClr val="8EDBD4"/>
+                </a:solidFill>
+                <a:latin typeface="Arial"/>
+              </a:rPr>
+              <a:t>N = 5</a:t>
+            </a:r>
+          </a:p>
+        </p:txBody>
+      </p:sp>
+      <p:sp>
+        <p:nvSpPr>
+          <p:cNvPr id="30" name="C3-E06 text 28" descr="sci-ppt:o028"/>
+          <p:cNvSpPr txBox="1"/>
+          <p:nvPr/>
+        </p:nvSpPr>
+        <p:spPr>
+          <a:xfrm>
+            <a:off x="8412480" y="5029200"/>
+            <a:ext cx="2926080" cy="262636"/>
+          </a:xfrm>
+          <a:prstGeom prst="rect">
+            <a:avLst/>
+          </a:prstGeom>
+          <a:noFill/>
+          <a:effectLst/>
+        </p:spPr>
+        <p:txBody>
+          <a:bodyPr wrap="none" lIns="18288" rIns="18288" tIns="18288" bIns="18288" anchor="t">
+            <a:spAutoFit/>
+          </a:bodyPr>
+          <a:lstStyle/>
+          <a:p>
+            <a:pPr algn="ctr">
+              <a:spcAft>
+                <a:spcPts val="0"/>
+              </a:spcAft>
+            </a:pPr>
+            <a:r>
+              <a:rPr sz="1400" b="1" i="0">
+                <a:solidFill>
+                  <a:srgbClr val="F2B880"/>
+                </a:solidFill>
+                <a:latin typeface="Arial"/>
+              </a:rPr>
+              <a:t>S₅ s = 3.2361</a:t>
+            </a:r>
+          </a:p>
+        </p:txBody>
+      </p:sp>
+      <p:sp>
+        <p:nvSpPr>
+          <p:cNvPr id="31" name="C3-E06 text 29" descr="sci-ppt:o029"/>
+          <p:cNvSpPr txBox="1"/>
+          <p:nvPr/>
+        </p:nvSpPr>
+        <p:spPr>
+          <a:xfrm>
+            <a:off x="457200" y="960120"/>
+            <a:ext cx="11247120" cy="262636"/>
+          </a:xfrm>
+          <a:prstGeom prst="rect">
+            <a:avLst/>
+          </a:prstGeom>
+          <a:noFill/>
+          <a:effectLst/>
+        </p:spPr>
+        <p:txBody>
+          <a:bodyPr wrap="none" lIns="18288" rIns="18288" tIns="18288" bIns="18288" anchor="t">
             <a:spAutoFit/>
           </a:bodyPr>
           <a:lstStyle/>
@@ -3893,27 +4109,67 @@
               </a:spcAft>
             </a:pPr>
             <a:r>
-              <a:rPr sz="1700" b="0" i="0">
+              <a:rPr sz="1400" b="1" i="0">
+                <a:solidFill>
+                  <a:srgbClr val="8EDBD4"/>
+                </a:solidFill>
+                <a:latin typeface="Arial"/>
+              </a:rPr>
+              <a:t>Regular polygons of N bubbles, neighbouring distance s</a:t>
+            </a:r>
+          </a:p>
+        </p:txBody>
+      </p:sp>
+      <p:sp>
+        <p:nvSpPr>
+          <p:cNvPr id="32" name="C3-E06 text 30" descr="sci-ppt:o030"/>
+          <p:cNvSpPr txBox="1"/>
+          <p:nvPr/>
+        </p:nvSpPr>
+        <p:spPr>
+          <a:xfrm>
+            <a:off x="457200" y="1371600"/>
+            <a:ext cx="11247120" cy="262636"/>
+          </a:xfrm>
+          <a:prstGeom prst="rect">
+            <a:avLst/>
+          </a:prstGeom>
+          <a:noFill/>
+          <a:effectLst/>
+        </p:spPr>
+        <p:txBody>
+          <a:bodyPr wrap="none" lIns="18288" rIns="18288" tIns="18288" bIns="18288" anchor="t">
+            <a:spAutoFit/>
+          </a:bodyPr>
+          <a:lstStyle/>
+          <a:p>
+            <a:pPr algn="l">
+              <a:spcAft>
+                <a:spcPts val="0"/>
+              </a:spcAft>
+            </a:pPr>
+            <a:r>
+              <a:rPr sz="1400" b="1" i="0">
                 <a:solidFill>
                   <a:srgbClr val="E7F0F3"/>
                 </a:solidFill>
                 <a:latin typeface="Arial"/>
               </a:rPr>
-              <a:t>N = 5</a:t>
-            </a:r>
-          </a:p>
-        </p:txBody>
-      </p:sp>
-      <p:sp>
-        <p:nvSpPr>
-          <p:cNvPr id="30" name="C3-E06 text 28" descr="sci-ppt:o028"/>
+              <a:t>dₖ = s sin(kπ/N) / sin(π/N),   S_N = Σₖ₌₁^{N−1} 1/dₖ</a:t>
+            </a:r>
+          </a:p>
+        </p:txBody>
+      </p:sp>
+      <p:sp>
+        <p:nvSpPr>
+          <p:cNvPr id="33" name="C3-E06 text 31" descr="sci-ppt:o031"/>
           <p:cNvSpPr txBox="1"/>
           <p:nvPr/>
         </p:nvSpPr>
         <p:spPr>
           <a:xfrm>
-            <a:off x="457200" y="731520"/>
-            <a:ext cx="10972800" cy="365760"/>
+            <a:off x="457200" y="5486400"/>
+            <a:ext cx="11247120" cy="254889"/>
           </a:xfrm>
           <a:prstGeom prst="rect">
             <a:avLst/>
@@ -3922,7 +4178,7 @@
           <a:effectLst/>
         </p:spPr>
         <p:txBody>
-          <a:bodyPr wrap="square" lIns="27432" rIns="27432" tIns="18288" bIns="18288" anchor="ctr">
+          <a:bodyPr wrap="none" lIns="18288" rIns="18288" tIns="18288" bIns="18288" anchor="t">
             <a:spAutoFit/>
           </a:bodyPr>
           <a:lstStyle/>
@@ -3933,49 +4189,27 @@
               </a:spcAft>
             </a:pPr>
             <a:r>
-              <a:rPr sz="1600" b="0" i="0">
+              <a:rPr sz="1350" b="0" i="0">
                 <a:solidFill>
                   <a:srgbClr val="E7F0F3"/>
                 </a:solidFill>
                 <a:latin typeface="Arial"/>
               </a:rPr>
-              <a:t>Regular polygons: pitch s joins adjacent bubble centres; diagonals have different lengths.</a:t>
-            </a:r>
-          </a:p>
-        </p:txBody>
-      </p:sp>
-      <p:cxnSp>
-        <p:nvCxnSpPr>
-          <p:cNvPr id="31" name="C3-E06 line 29" descr="sci-ppt:o029"/>
-          <p:cNvCxnSpPr/>
-          <p:nvPr/>
-        </p:nvCxnSpPr>
-        <p:spPr>
-          <a:xfrm>
-            <a:off x="274320" y="3977639"/>
-            <a:ext cx="11612880" cy="0"/>
-          </a:xfrm>
-          <a:prstGeom prst="line">
-            <a:avLst/>
-          </a:prstGeom>
-          <a:ln w="12700">
-            <a:solidFill>
-              <a:srgbClr val="405967"/>
-            </a:solidFill>
-          </a:ln>
-          <a:effectLst/>
-        </p:spPr>
-      </p:cxnSp>
-      <p:sp>
-        <p:nvSpPr>
-          <p:cNvPr id="32" name="C3-E06 text 30" descr="sci-ppt:o030"/>
+              <a:t>S₃ = 2/s,   S₄ = (2 + 1/√2)/s,   S₅ = (2 + 2/φ)/s,   φ = (1 + √5)/2</a:t>
+            </a:r>
+          </a:p>
+        </p:txBody>
+      </p:sp>
+      <p:sp>
+        <p:nvSpPr>
+          <p:cNvPr id="34" name="C3-E06 text 32" descr="sci-ppt:o032"/>
           <p:cNvSpPr txBox="1"/>
           <p:nvPr/>
         </p:nvSpPr>
         <p:spPr>
           <a:xfrm>
-            <a:off x="320040" y="4096512"/>
-            <a:ext cx="5715000" cy="246888"/>
+            <a:off x="457200" y="5943600"/>
+            <a:ext cx="11247120" cy="239395"/>
           </a:xfrm>
           <a:prstGeom prst="rect">
             <a:avLst/>
@@ -3984,7 +4218,7 @@
           <a:effectLst/>
         </p:spPr>
         <p:txBody>
-          <a:bodyPr wrap="square" lIns="27432" rIns="27432" tIns="18288" bIns="18288" anchor="ctr">
+          <a:bodyPr wrap="none" lIns="18288" rIns="18288" tIns="18288" bIns="18288" anchor="t">
             <a:spAutoFit/>
           </a:bodyPr>
           <a:lstStyle/>
@@ -3995,27 +4229,27 @@
               </a:spcAft>
             </a:pPr>
             <a:r>
-              <a:rPr sz="1150" b="0" i="0">
+              <a:rPr sz="1250" b="0" i="0">
                 <a:solidFill>
-                  <a:srgbClr val="B4C7D2"/>
+                  <a:srgbClr val="F2B880"/>
                 </a:solidFill>
                 <a:latin typeface="Arial"/>
               </a:rPr>
-              <a:t>• N = 3, 4, 5 vertices</a:t>
-            </a:r>
-          </a:p>
-        </p:txBody>
-      </p:sp>
-      <p:sp>
-        <p:nvSpPr>
-          <p:cNvPr id="33" name="C3-E06 text 31" descr="sci-ppt:o031"/>
+              <a:t>Every bubble sees the same sum of reciprocal distances, so they can share one radius history in this constrained control.</a:t>
+            </a:r>
+          </a:p>
+        </p:txBody>
+      </p:sp>
+      <p:sp>
+        <p:nvSpPr>
+          <p:cNvPr id="35" name="C3-E06 text 33" descr="sci-ppt:o033"/>
           <p:cNvSpPr txBox="1"/>
           <p:nvPr/>
         </p:nvSpPr>
         <p:spPr>
           <a:xfrm>
-            <a:off x="6217920" y="4096512"/>
-            <a:ext cx="5715000" cy="246888"/>
+            <a:off x="320040" y="6510528"/>
+            <a:ext cx="11521440" cy="200660"/>
           </a:xfrm>
           <a:prstGeom prst="rect">
             <a:avLst/>
@@ -4024,287 +4258,7 @@
           <a:effectLst/>
         </p:spPr>
         <p:txBody>
-          <a:bodyPr wrap="square" lIns="27432" rIns="27432" tIns="18288" bIns="18288" anchor="ctr">
-            <a:spAutoFit/>
-          </a:bodyPr>
-          <a:lstStyle/>
-          <a:p>
-            <a:pPr algn="l">
-              <a:spcAft>
-                <a:spcPts val="0"/>
-              </a:spcAft>
-            </a:pPr>
-            <a:r>
-              <a:rPr sz="1150" b="0" i="0">
-                <a:solidFill>
-                  <a:srgbClr val="B4C7D2"/>
-                </a:solidFill>
-                <a:latin typeface="Arial"/>
-              </a:rPr>
-              <a:t>• s neighbor pitch</a:t>
-            </a:r>
-          </a:p>
-        </p:txBody>
-      </p:sp>
-      <p:sp>
-        <p:nvSpPr>
-          <p:cNvPr id="34" name="C3-E06 text 32" descr="sci-ppt:o032"/>
-          <p:cNvSpPr txBox="1"/>
-          <p:nvPr/>
-        </p:nvSpPr>
-        <p:spPr>
-          <a:xfrm>
-            <a:off x="320040" y="4329684"/>
-            <a:ext cx="5715000" cy="246888"/>
-          </a:xfrm>
-          <a:prstGeom prst="rect">
-            <a:avLst/>
-          </a:prstGeom>
-          <a:noFill/>
-          <a:effectLst/>
-        </p:spPr>
-        <p:txBody>
-          <a:bodyPr wrap="square" lIns="27432" rIns="27432" tIns="18288" bIns="18288" anchor="ctr">
-            <a:spAutoFit/>
-          </a:bodyPr>
-          <a:lstStyle/>
-          <a:p>
-            <a:pPr algn="l">
-              <a:spcAft>
-                <a:spcPts val="0"/>
-              </a:spcAft>
-            </a:pPr>
-            <a:r>
-              <a:rPr sz="1150" b="0" i="0">
-                <a:solidFill>
-                  <a:srgbClr val="B4C7D2"/>
-                </a:solidFill>
-                <a:latin typeface="Arial"/>
-              </a:rPr>
-              <a:t>• d_k chord distances</a:t>
-            </a:r>
-          </a:p>
-        </p:txBody>
-      </p:sp>
-      <p:sp>
-        <p:nvSpPr>
-          <p:cNvPr id="35" name="C3-E06 text 33" descr="sci-ppt:o033"/>
-          <p:cNvSpPr txBox="1"/>
-          <p:nvPr/>
-        </p:nvSpPr>
-        <p:spPr>
-          <a:xfrm>
-            <a:off x="6217920" y="4329684"/>
-            <a:ext cx="5715000" cy="246888"/>
-          </a:xfrm>
-          <a:prstGeom prst="rect">
-            <a:avLst/>
-          </a:prstGeom>
-          <a:noFill/>
-          <a:effectLst/>
-        </p:spPr>
-        <p:txBody>
-          <a:bodyPr wrap="square" lIns="27432" rIns="27432" tIns="18288" bIns="18288" anchor="ctr">
-            <a:spAutoFit/>
-          </a:bodyPr>
-          <a:lstStyle/>
-          <a:p>
-            <a:pPr algn="l">
-              <a:spcAft>
-                <a:spcPts val="0"/>
-              </a:spcAft>
-            </a:pPr>
-            <a:r>
-              <a:rPr sz="1150" b="0" i="0">
-                <a:solidFill>
-                  <a:srgbClr val="B4C7D2"/>
-                </a:solidFill>
-                <a:latin typeface="Arial"/>
-              </a:rPr>
-              <a:t>• S_N = Σ 1/d_k</a:t>
-            </a:r>
-          </a:p>
-        </p:txBody>
-      </p:sp>
-      <p:sp>
-        <p:nvSpPr>
-          <p:cNvPr id="36" name="C3-E06 text 34" descr="sci-ppt:o034"/>
-          <p:cNvSpPr txBox="1"/>
-          <p:nvPr/>
-        </p:nvSpPr>
-        <p:spPr>
-          <a:xfrm>
-            <a:off x="320040" y="4562856"/>
-            <a:ext cx="5715000" cy="246888"/>
-          </a:xfrm>
-          <a:prstGeom prst="rect">
-            <a:avLst/>
-          </a:prstGeom>
-          <a:noFill/>
-          <a:effectLst/>
-        </p:spPr>
-        <p:txBody>
-          <a:bodyPr wrap="square" lIns="27432" rIns="27432" tIns="18288" bIns="18288" anchor="ctr">
-            <a:spAutoFit/>
-          </a:bodyPr>
-          <a:lstStyle/>
-          <a:p>
-            <a:pPr algn="l">
-              <a:spcAft>
-                <a:spcPts val="0"/>
-              </a:spcAft>
-            </a:pPr>
-            <a:r>
-              <a:rPr sz="1150" b="0" i="0">
-                <a:solidFill>
-                  <a:srgbClr val="B4C7D2"/>
-                </a:solidFill>
-                <a:latin typeface="Arial"/>
-              </a:rPr>
-              <a:t>• k, π, sin, φ_g: geometry legend</a:t>
-            </a:r>
-          </a:p>
-        </p:txBody>
-      </p:sp>
-      <p:sp>
-        <p:nvSpPr>
-          <p:cNvPr id="37" name="C3-E06 text 35" descr="sci-ppt:o035"/>
-          <p:cNvSpPr txBox="1"/>
-          <p:nvPr/>
-        </p:nvSpPr>
-        <p:spPr>
-          <a:xfrm>
-            <a:off x="320040" y="5596128"/>
-            <a:ext cx="11430000" cy="292608"/>
-          </a:xfrm>
-          <a:prstGeom prst="rect">
-            <a:avLst/>
-          </a:prstGeom>
-          <a:noFill/>
-          <a:effectLst/>
-        </p:spPr>
-        <p:txBody>
-          <a:bodyPr wrap="square" lIns="27432" rIns="27432" tIns="18288" bIns="18288" anchor="ctr">
-            <a:spAutoFit/>
-          </a:bodyPr>
-          <a:lstStyle/>
-          <a:p>
-            <a:pPr algn="l">
-              <a:spcAft>
-                <a:spcPts val="0"/>
-              </a:spcAft>
-            </a:pPr>
-            <a:r>
-              <a:rPr sz="1150" b="0" i="0">
-                <a:solidFill>
-                  <a:srgbClr val="8EDBD4"/>
-                </a:solidFill>
-                <a:latin typeface="Arial"/>
-              </a:rPr>
-              <a:t>Triangle: two neighbors at s</a:t>
-            </a:r>
-          </a:p>
-        </p:txBody>
-      </p:sp>
-      <p:sp>
-        <p:nvSpPr>
-          <p:cNvPr id="38" name="C3-E06 text 36" descr="sci-ppt:o036"/>
-          <p:cNvSpPr txBox="1"/>
-          <p:nvPr/>
-        </p:nvSpPr>
-        <p:spPr>
-          <a:xfrm>
-            <a:off x="320040" y="5870448"/>
-            <a:ext cx="11430000" cy="292608"/>
-          </a:xfrm>
-          <a:prstGeom prst="rect">
-            <a:avLst/>
-          </a:prstGeom>
-          <a:noFill/>
-          <a:effectLst/>
-        </p:spPr>
-        <p:txBody>
-          <a:bodyPr wrap="square" lIns="27432" rIns="27432" tIns="18288" bIns="18288" anchor="ctr">
-            <a:spAutoFit/>
-          </a:bodyPr>
-          <a:lstStyle/>
-          <a:p>
-            <a:pPr algn="l">
-              <a:spcAft>
-                <a:spcPts val="0"/>
-              </a:spcAft>
-            </a:pPr>
-            <a:r>
-              <a:rPr sz="1150" b="0" i="0">
-                <a:solidFill>
-                  <a:srgbClr val="8EDBD4"/>
-                </a:solidFill>
-                <a:latin typeface="Arial"/>
-              </a:rPr>
-              <a:t>Square: two at s, one at √2 s</a:t>
-            </a:r>
-          </a:p>
-        </p:txBody>
-      </p:sp>
-      <p:sp>
-        <p:nvSpPr>
-          <p:cNvPr id="39" name="C3-E06 text 37" descr="sci-ppt:o037"/>
-          <p:cNvSpPr txBox="1"/>
-          <p:nvPr/>
-        </p:nvSpPr>
-        <p:spPr>
-          <a:xfrm>
-            <a:off x="320040" y="6144768"/>
-            <a:ext cx="11430000" cy="292608"/>
-          </a:xfrm>
-          <a:prstGeom prst="rect">
-            <a:avLst/>
-          </a:prstGeom>
-          <a:noFill/>
-          <a:effectLst/>
-        </p:spPr>
-        <p:txBody>
-          <a:bodyPr wrap="square" lIns="27432" rIns="27432" tIns="18288" bIns="18288" anchor="ctr">
-            <a:spAutoFit/>
-          </a:bodyPr>
-          <a:lstStyle/>
-          <a:p>
-            <a:pPr algn="l">
-              <a:spcAft>
-                <a:spcPts val="0"/>
-              </a:spcAft>
-            </a:pPr>
-            <a:r>
-              <a:rPr sz="1150" b="0" i="0">
-                <a:solidFill>
-                  <a:srgbClr val="8EDBD4"/>
-                </a:solidFill>
-                <a:latin typeface="Arial"/>
-              </a:rPr>
-              <a:t>Pentagon: two at s, two at φ_g s</a:t>
-            </a:r>
-          </a:p>
-        </p:txBody>
-      </p:sp>
-      <p:sp>
-        <p:nvSpPr>
-          <p:cNvPr id="40" name="C3-E06 text 38" descr="sci-ppt:o038"/>
-          <p:cNvSpPr txBox="1"/>
-          <p:nvPr/>
-        </p:nvSpPr>
-        <p:spPr>
-          <a:xfrm>
-            <a:off x="320040" y="6473952"/>
-            <a:ext cx="11430000" cy="256032"/>
-          </a:xfrm>
-          <a:prstGeom prst="rect">
-            <a:avLst/>
-          </a:prstGeom>
-          <a:noFill/>
-          <a:effectLst/>
-        </p:spPr>
-        <p:txBody>
-          <a:bodyPr wrap="square" lIns="27432" rIns="27432" tIns="18288" bIns="18288" anchor="ctr">
+          <a:bodyPr wrap="none" lIns="18288" rIns="18288" tIns="18288" bIns="18288" anchor="t">
             <a:spAutoFit/>
           </a:bodyPr>
           <a:lstStyle/>
@@ -4321,7 +4275,7 @@
                 </a:solidFill>
                 <a:latin typeface="Arial"/>
               </a:rPr>
-              <a:t>Model schematic; geometry is not to scale.</a:t>
+              <a:t>Exact polygon geometry of Eq. C3-E06 (chords drawn dashed).</a:t>
             </a:r>
           </a:p>
         </p:txBody>
